--- a/Entregas/UC/Entrega 3.pptx
+++ b/Entregas/UC/Entrega 3.pptx
@@ -213,703 +213,44 @@
 </p188:authorLst>
 </file>
 
-<file path=ppt/revisionInfo.xml><?xml version="1.0" encoding="utf-8"?>
-<p1510:revInfo xmlns:a="http://schemas.openxmlformats.org/drawingml/2006/main" xmlns:r="http://schemas.openxmlformats.org/officeDocument/2006/relationships" xmlns:p1510="http://schemas.microsoft.com/office/powerpoint/2015/10/main">
-  <p1510:revLst>
-    <p1510:client id="{4F83F197-9E1A-4986-AD7A-C7E2DB7A04D0}" v="15" dt="2025-11-07T14:34:11.763"/>
-  </p1510:revLst>
-</p1510:revInfo>
-</file>
-
 <file path=ppt/changesInfos/changesInfo1.xml><?xml version="1.0" encoding="utf-8"?>
 <pc:chgInfo xmlns:a="http://schemas.openxmlformats.org/drawingml/2006/main" xmlns:r="http://schemas.openxmlformats.org/officeDocument/2006/relationships" xmlns:ac="http://schemas.microsoft.com/office/drawing/2013/main/command" xmlns:pc="http://schemas.microsoft.com/office/powerpoint/2013/main/command">
   <pc:docChgLst>
-    <pc:chgData name="Vicente Alfredo Garay Robertson" userId="S::vicente.garay@uc.cl::78783c43-e97e-49e6-a0de-64154ae66e65" providerId="AD" clId="Web-{79789B96-3DC9-0542-6205-3C6440AC07DC}"/>
-    <pc:docChg chg="sldOrd">
-      <pc:chgData name="Vicente Alfredo Garay Robertson" userId="S::vicente.garay@uc.cl::78783c43-e97e-49e6-a0de-64154ae66e65" providerId="AD" clId="Web-{79789B96-3DC9-0542-6205-3C6440AC07DC}" dt="2025-10-30T01:18:07.983" v="0"/>
+    <pc:chgData name="Franco Andrés Chiappe Donoso" userId="952ef6fb-7da9-433b-9cb5-ab1c1c91cce3" providerId="ADAL" clId="{D482683E-DF45-4BA1-B60E-919AB3CEA91E}"/>
+    <pc:docChg chg="undo redo custSel addSld delSld modSld sldOrd delSection modSection">
+      <pc:chgData name="Franco Andrés Chiappe Donoso" userId="952ef6fb-7da9-433b-9cb5-ab1c1c91cce3" providerId="ADAL" clId="{D482683E-DF45-4BA1-B60E-919AB3CEA91E}" dt="2025-12-08T17:07:04.142" v="1238" actId="20577"/>
       <pc:docMkLst>
         <pc:docMk/>
       </pc:docMkLst>
-    </pc:docChg>
-  </pc:docChgLst>
-  <pc:docChgLst>
-    <pc:chgData name="Ziyu Guo ." userId="S::ziyuguo@uc.cl::5d0ee9bc-099e-4375-8de4-b9df224602ff" providerId="AD" clId="Web-{0808568B-4248-7334-1BF1-ABB161FFBFC4}"/>
-    <pc:docChg chg="addSld delSld modSld modSection">
-      <pc:chgData name="Ziyu Guo ." userId="S::ziyuguo@uc.cl::5d0ee9bc-099e-4375-8de4-b9df224602ff" providerId="AD" clId="Web-{0808568B-4248-7334-1BF1-ABB161FFBFC4}" dt="2025-10-30T01:56:53.084" v="512" actId="14100"/>
-      <pc:docMkLst>
-        <pc:docMk/>
-      </pc:docMkLst>
-    </pc:docChg>
-  </pc:docChgLst>
-  <pc:docChgLst>
-    <pc:chgData name="Franco Andrés Chiappe Donoso" userId="952ef6fb-7da9-433b-9cb5-ab1c1c91cce3" providerId="ADAL" clId="{D482683E-DF45-4BA1-B60E-919AB3CEA91E}"/>
-    <pc:docChg chg="undo redo custSel addSld delSld modSld sldOrd delSection modSection">
-      <pc:chgData name="Franco Andrés Chiappe Donoso" userId="952ef6fb-7da9-433b-9cb5-ab1c1c91cce3" providerId="ADAL" clId="{D482683E-DF45-4BA1-B60E-919AB3CEA91E}" dt="2025-11-07T14:34:11.212" v="1235"/>
-      <pc:docMkLst>
-        <pc:docMk/>
-      </pc:docMkLst>
-      <pc:sldChg chg="addSp modNotes">
-        <pc:chgData name="Franco Andrés Chiappe Donoso" userId="952ef6fb-7da9-433b-9cb5-ab1c1c91cce3" providerId="ADAL" clId="{D482683E-DF45-4BA1-B60E-919AB3CEA91E}" dt="2025-11-07T14:34:11.212" v="1235"/>
+      <pc:sldChg chg="addSp modSp mod modNotes">
+        <pc:chgData name="Franco Andrés Chiappe Donoso" userId="952ef6fb-7da9-433b-9cb5-ab1c1c91cce3" providerId="ADAL" clId="{D482683E-DF45-4BA1-B60E-919AB3CEA91E}" dt="2025-12-08T17:02:38.567" v="1237" actId="1076"/>
         <pc:sldMkLst>
           <pc:docMk/>
           <pc:sldMk cId="2208754760" sldId="272"/>
         </pc:sldMkLst>
-        <pc:spChg chg="add">
-          <ac:chgData name="Franco Andrés Chiappe Donoso" userId="952ef6fb-7da9-433b-9cb5-ab1c1c91cce3" providerId="ADAL" clId="{D482683E-DF45-4BA1-B60E-919AB3CEA91E}" dt="2025-11-07T14:34:10.504" v="1234"/>
-          <ac:spMkLst>
+        <pc:picChg chg="mod">
+          <ac:chgData name="Franco Andrés Chiappe Donoso" userId="952ef6fb-7da9-433b-9cb5-ab1c1c91cce3" providerId="ADAL" clId="{D482683E-DF45-4BA1-B60E-919AB3CEA91E}" dt="2025-12-08T17:02:38.567" v="1237" actId="1076"/>
+          <ac:picMkLst>
             <pc:docMk/>
             <pc:sldMk cId="2208754760" sldId="272"/>
-            <ac:spMk id="4" creationId="{0F82135A-7232-3C0E-C2F2-43944D623A23}"/>
-          </ac:spMkLst>
-        </pc:spChg>
-        <pc:spChg chg="add">
-          <ac:chgData name="Franco Andrés Chiappe Donoso" userId="952ef6fb-7da9-433b-9cb5-ab1c1c91cce3" providerId="ADAL" clId="{D482683E-DF45-4BA1-B60E-919AB3CEA91E}" dt="2025-11-07T14:34:10.504" v="1234"/>
-          <ac:spMkLst>
-            <pc:docMk/>
-            <pc:sldMk cId="2208754760" sldId="272"/>
-            <ac:spMk id="5" creationId="{F9D72983-E891-728D-1B6E-8A4EEEE12B73}"/>
-          </ac:spMkLst>
-        </pc:spChg>
+            <ac:picMk id="6" creationId="{AA2B38B9-51DB-DB49-0CCD-A383BA2C7FDC}"/>
+          </ac:picMkLst>
+        </pc:picChg>
       </pc:sldChg>
       <pc:sldChg chg="addSp delSp modSp mod">
-        <pc:chgData name="Franco Andrés Chiappe Donoso" userId="952ef6fb-7da9-433b-9cb5-ab1c1c91cce3" providerId="ADAL" clId="{D482683E-DF45-4BA1-B60E-919AB3CEA91E}" dt="2025-11-07T14:34:10.504" v="1234"/>
+        <pc:chgData name="Franco Andrés Chiappe Donoso" userId="952ef6fb-7da9-433b-9cb5-ab1c1c91cce3" providerId="ADAL" clId="{D482683E-DF45-4BA1-B60E-919AB3CEA91E}" dt="2025-12-08T17:07:04.142" v="1238" actId="20577"/>
         <pc:sldMkLst>
           <pc:docMk/>
           <pc:sldMk cId="1453617272" sldId="273"/>
         </pc:sldMkLst>
-        <pc:spChg chg="add">
-          <ac:chgData name="Franco Andrés Chiappe Donoso" userId="952ef6fb-7da9-433b-9cb5-ab1c1c91cce3" providerId="ADAL" clId="{D482683E-DF45-4BA1-B60E-919AB3CEA91E}" dt="2025-11-07T14:34:10.504" v="1234"/>
-          <ac:spMkLst>
-            <pc:docMk/>
-            <pc:sldMk cId="1453617272" sldId="273"/>
-            <ac:spMk id="2" creationId="{42BAB7C1-E542-D7F3-AEA3-21CC26681AB9}"/>
-          </ac:spMkLst>
-        </pc:spChg>
         <pc:spChg chg="mod">
-          <ac:chgData name="Franco Andrés Chiappe Donoso" userId="952ef6fb-7da9-433b-9cb5-ab1c1c91cce3" providerId="ADAL" clId="{D482683E-DF45-4BA1-B60E-919AB3CEA91E}" dt="2025-10-30T01:48:31.318" v="1134" actId="1076"/>
-          <ac:spMkLst>
-            <pc:docMk/>
-            <pc:sldMk cId="1453617272" sldId="273"/>
-            <ac:spMk id="3" creationId="{46C2D0EA-90D1-BC37-B26E-AF8CE5AEA162}"/>
-          </ac:spMkLst>
-        </pc:spChg>
-        <pc:spChg chg="mod">
-          <ac:chgData name="Franco Andrés Chiappe Donoso" userId="952ef6fb-7da9-433b-9cb5-ab1c1c91cce3" providerId="ADAL" clId="{D482683E-DF45-4BA1-B60E-919AB3CEA91E}" dt="2025-10-30T02:03:19.515" v="1209" actId="14100"/>
-          <ac:spMkLst>
-            <pc:docMk/>
-            <pc:sldMk cId="1453617272" sldId="273"/>
-            <ac:spMk id="4" creationId="{5E811C5F-0E93-1E2D-2BB4-5CF0B8085898}"/>
-          </ac:spMkLst>
-        </pc:spChg>
-        <pc:spChg chg="add">
-          <ac:chgData name="Franco Andrés Chiappe Donoso" userId="952ef6fb-7da9-433b-9cb5-ab1c1c91cce3" providerId="ADAL" clId="{D482683E-DF45-4BA1-B60E-919AB3CEA91E}" dt="2025-11-07T14:34:10.504" v="1234"/>
-          <ac:spMkLst>
-            <pc:docMk/>
-            <pc:sldMk cId="1453617272" sldId="273"/>
-            <ac:spMk id="6" creationId="{DB851920-FB8D-7DBA-694F-99489DD24C9D}"/>
-          </ac:spMkLst>
-        </pc:spChg>
-        <pc:spChg chg="mod">
-          <ac:chgData name="Franco Andrés Chiappe Donoso" userId="952ef6fb-7da9-433b-9cb5-ab1c1c91cce3" providerId="ADAL" clId="{D482683E-DF45-4BA1-B60E-919AB3CEA91E}" dt="2025-10-30T01:25:50.398" v="918"/>
+          <ac:chgData name="Franco Andrés Chiappe Donoso" userId="952ef6fb-7da9-433b-9cb5-ab1c1c91cce3" providerId="ADAL" clId="{D482683E-DF45-4BA1-B60E-919AB3CEA91E}" dt="2025-12-08T17:07:04.142" v="1238" actId="20577"/>
           <ac:spMkLst>
             <pc:docMk/>
             <pc:sldMk cId="1453617272" sldId="273"/>
             <ac:spMk id="13" creationId="{4FCA1056-F0AA-07E5-60C9-9C6E6D2839AD}"/>
           </ac:spMkLst>
         </pc:spChg>
-      </pc:sldChg>
-      <pc:sldChg chg="addSp modSp mod modNotes">
-        <pc:chgData name="Franco Andrés Chiappe Donoso" userId="952ef6fb-7da9-433b-9cb5-ab1c1c91cce3" providerId="ADAL" clId="{D482683E-DF45-4BA1-B60E-919AB3CEA91E}" dt="2025-11-07T14:34:11.212" v="1235"/>
-        <pc:sldMkLst>
-          <pc:docMk/>
-          <pc:sldMk cId="1048840110" sldId="283"/>
-        </pc:sldMkLst>
-        <pc:spChg chg="mod">
-          <ac:chgData name="Franco Andrés Chiappe Donoso" userId="952ef6fb-7da9-433b-9cb5-ab1c1c91cce3" providerId="ADAL" clId="{D482683E-DF45-4BA1-B60E-919AB3CEA91E}" dt="2025-10-30T02:06:59.245" v="1216"/>
-          <ac:spMkLst>
-            <pc:docMk/>
-            <pc:sldMk cId="1048840110" sldId="283"/>
-            <ac:spMk id="2" creationId="{45C52258-5DCB-74B3-AC8D-644FFEDC4360}"/>
-          </ac:spMkLst>
-        </pc:spChg>
-        <pc:spChg chg="mod">
-          <ac:chgData name="Franco Andrés Chiappe Donoso" userId="952ef6fb-7da9-433b-9cb5-ab1c1c91cce3" providerId="ADAL" clId="{D482683E-DF45-4BA1-B60E-919AB3CEA91E}" dt="2025-10-30T02:07:43.270" v="1218" actId="14100"/>
-          <ac:spMkLst>
-            <pc:docMk/>
-            <pc:sldMk cId="1048840110" sldId="283"/>
-            <ac:spMk id="3" creationId="{26A3D6DD-510D-6A14-3402-4F48DAA77B5B}"/>
-          </ac:spMkLst>
-        </pc:spChg>
-        <pc:spChg chg="add">
-          <ac:chgData name="Franco Andrés Chiappe Donoso" userId="952ef6fb-7da9-433b-9cb5-ab1c1c91cce3" providerId="ADAL" clId="{D482683E-DF45-4BA1-B60E-919AB3CEA91E}" dt="2025-11-07T14:34:10.504" v="1234"/>
-          <ac:spMkLst>
-            <pc:docMk/>
-            <pc:sldMk cId="1048840110" sldId="283"/>
-            <ac:spMk id="4" creationId="{D92C6F93-254F-86F3-CB94-447743487861}"/>
-          </ac:spMkLst>
-        </pc:spChg>
-        <pc:spChg chg="add">
-          <ac:chgData name="Franco Andrés Chiappe Donoso" userId="952ef6fb-7da9-433b-9cb5-ab1c1c91cce3" providerId="ADAL" clId="{D482683E-DF45-4BA1-B60E-919AB3CEA91E}" dt="2025-11-07T14:34:10.504" v="1234"/>
-          <ac:spMkLst>
-            <pc:docMk/>
-            <pc:sldMk cId="1048840110" sldId="283"/>
-            <ac:spMk id="5" creationId="{33BE423A-1DC2-D2DD-B0D6-57B18059A40B}"/>
-          </ac:spMkLst>
-        </pc:spChg>
-      </pc:sldChg>
-      <pc:sldChg chg="addSp delSp modSp mod modCm modNotes">
-        <pc:chgData name="Franco Andrés Chiappe Donoso" userId="952ef6fb-7da9-433b-9cb5-ab1c1c91cce3" providerId="ADAL" clId="{D482683E-DF45-4BA1-B60E-919AB3CEA91E}" dt="2025-11-07T14:34:11.212" v="1235"/>
-        <pc:sldMkLst>
-          <pc:docMk/>
-          <pc:sldMk cId="1435351318" sldId="301"/>
-        </pc:sldMkLst>
-        <pc:spChg chg="add">
-          <ac:chgData name="Franco Andrés Chiappe Donoso" userId="952ef6fb-7da9-433b-9cb5-ab1c1c91cce3" providerId="ADAL" clId="{D482683E-DF45-4BA1-B60E-919AB3CEA91E}" dt="2025-11-07T14:34:10.504" v="1234"/>
-          <ac:spMkLst>
-            <pc:docMk/>
-            <pc:sldMk cId="1435351318" sldId="301"/>
-            <ac:spMk id="3" creationId="{5B7FF2DF-59CE-0D0A-FA6C-792832BC8A7B}"/>
-          </ac:spMkLst>
-        </pc:spChg>
-        <pc:spChg chg="add">
-          <ac:chgData name="Franco Andrés Chiappe Donoso" userId="952ef6fb-7da9-433b-9cb5-ab1c1c91cce3" providerId="ADAL" clId="{D482683E-DF45-4BA1-B60E-919AB3CEA91E}" dt="2025-11-07T14:34:10.504" v="1234"/>
-          <ac:spMkLst>
-            <pc:docMk/>
-            <pc:sldMk cId="1435351318" sldId="301"/>
-            <ac:spMk id="4" creationId="{14E3BCCB-8AB3-5BF9-834D-35A5E260B321}"/>
-          </ac:spMkLst>
-        </pc:spChg>
-        <pc:spChg chg="add mod">
-          <ac:chgData name="Franco Andrés Chiappe Donoso" userId="952ef6fb-7da9-433b-9cb5-ab1c1c91cce3" providerId="ADAL" clId="{D482683E-DF45-4BA1-B60E-919AB3CEA91E}" dt="2025-10-30T01:46:04.529" v="1130"/>
-          <ac:spMkLst>
-            <pc:docMk/>
-            <pc:sldMk cId="1435351318" sldId="301"/>
-            <ac:spMk id="7" creationId="{E88CA7DA-E5A8-E119-CD47-9E027147249A}"/>
-          </ac:spMkLst>
-        </pc:spChg>
-        <pc:extLst>
-          <p:ext xmlns:p="http://schemas.openxmlformats.org/presentationml/2006/main" uri="{D6D511B9-2390-475A-947B-AFAB55BFBCF1}">
-            <pc226:cmChg xmlns:pc226="http://schemas.microsoft.com/office/powerpoint/2022/06/main/command" chg="mod">
-              <pc226:chgData name="Franco Andrés Chiappe Donoso" userId="952ef6fb-7da9-433b-9cb5-ab1c1c91cce3" providerId="ADAL" clId="{D482683E-DF45-4BA1-B60E-919AB3CEA91E}" dt="2025-10-30T01:45:56.659" v="1127" actId="478"/>
-              <pc2:cmMkLst xmlns:pc2="http://schemas.microsoft.com/office/powerpoint/2019/9/main/command">
-                <pc:docMk/>
-                <pc:sldMk cId="1435351318" sldId="301"/>
-                <pc2:cmMk id="{973E605F-4F95-43DB-9723-CF12F3697A57}"/>
-              </pc2:cmMkLst>
-            </pc226:cmChg>
-          </p:ext>
-        </pc:extLst>
-      </pc:sldChg>
-      <pc:sldChg chg="addSp delSp modSp mod modNotes">
-        <pc:chgData name="Franco Andrés Chiappe Donoso" userId="952ef6fb-7da9-433b-9cb5-ab1c1c91cce3" providerId="ADAL" clId="{D482683E-DF45-4BA1-B60E-919AB3CEA91E}" dt="2025-11-07T14:34:11.212" v="1235"/>
-        <pc:sldMkLst>
-          <pc:docMk/>
-          <pc:sldMk cId="1503279884" sldId="302"/>
-        </pc:sldMkLst>
-        <pc:spChg chg="mod">
-          <ac:chgData name="Franco Andrés Chiappe Donoso" userId="952ef6fb-7da9-433b-9cb5-ab1c1c91cce3" providerId="ADAL" clId="{D482683E-DF45-4BA1-B60E-919AB3CEA91E}" dt="2025-10-30T00:45:01.594" v="644" actId="20577"/>
-          <ac:spMkLst>
-            <pc:docMk/>
-            <pc:sldMk cId="1503279884" sldId="302"/>
-            <ac:spMk id="2" creationId="{CC6B04BF-FBB0-590D-5E8D-127AECABBD92}"/>
-          </ac:spMkLst>
-        </pc:spChg>
-        <pc:spChg chg="add">
-          <ac:chgData name="Franco Andrés Chiappe Donoso" userId="952ef6fb-7da9-433b-9cb5-ab1c1c91cce3" providerId="ADAL" clId="{D482683E-DF45-4BA1-B60E-919AB3CEA91E}" dt="2025-11-07T14:34:10.504" v="1234"/>
-          <ac:spMkLst>
-            <pc:docMk/>
-            <pc:sldMk cId="1503279884" sldId="302"/>
-            <ac:spMk id="4" creationId="{C4CD93BE-B8C8-4DD7-86B4-60D45E6AD643}"/>
-          </ac:spMkLst>
-        </pc:spChg>
-        <pc:spChg chg="mod">
-          <ac:chgData name="Franco Andrés Chiappe Donoso" userId="952ef6fb-7da9-433b-9cb5-ab1c1c91cce3" providerId="ADAL" clId="{D482683E-DF45-4BA1-B60E-919AB3CEA91E}" dt="2025-10-30T01:45:02.670" v="1125" actId="14100"/>
-          <ac:spMkLst>
-            <pc:docMk/>
-            <pc:sldMk cId="1503279884" sldId="302"/>
-            <ac:spMk id="5" creationId="{35A23D5A-DE76-E82E-39D7-F04EC43E704F}"/>
-          </ac:spMkLst>
-        </pc:spChg>
-        <pc:spChg chg="mod">
-          <ac:chgData name="Franco Andrés Chiappe Donoso" userId="952ef6fb-7da9-433b-9cb5-ab1c1c91cce3" providerId="ADAL" clId="{D482683E-DF45-4BA1-B60E-919AB3CEA91E}" dt="2025-10-30T02:04:03.612" v="1215" actId="1036"/>
-          <ac:spMkLst>
-            <pc:docMk/>
-            <pc:sldMk cId="1503279884" sldId="302"/>
-            <ac:spMk id="6" creationId="{71FDD230-9297-89A9-1083-C732A196E681}"/>
-          </ac:spMkLst>
-        </pc:spChg>
-        <pc:spChg chg="add">
-          <ac:chgData name="Franco Andrés Chiappe Donoso" userId="952ef6fb-7da9-433b-9cb5-ab1c1c91cce3" providerId="ADAL" clId="{D482683E-DF45-4BA1-B60E-919AB3CEA91E}" dt="2025-11-07T14:34:10.504" v="1234"/>
-          <ac:spMkLst>
-            <pc:docMk/>
-            <pc:sldMk cId="1503279884" sldId="302"/>
-            <ac:spMk id="7" creationId="{9B44A999-9DFC-A9DE-0846-9B9D3DBF3C62}"/>
-          </ac:spMkLst>
-        </pc:spChg>
-        <pc:spChg chg="mod">
-          <ac:chgData name="Franco Andrés Chiappe Donoso" userId="952ef6fb-7da9-433b-9cb5-ab1c1c91cce3" providerId="ADAL" clId="{D482683E-DF45-4BA1-B60E-919AB3CEA91E}" dt="2025-10-30T02:04:03.612" v="1215" actId="1036"/>
-          <ac:spMkLst>
-            <pc:docMk/>
-            <pc:sldMk cId="1503279884" sldId="302"/>
-            <ac:spMk id="14" creationId="{BC983D99-4283-F165-8C2F-213CE62D3D4F}"/>
-          </ac:spMkLst>
-        </pc:spChg>
-        <pc:spChg chg="mod">
-          <ac:chgData name="Franco Andrés Chiappe Donoso" userId="952ef6fb-7da9-433b-9cb5-ab1c1c91cce3" providerId="ADAL" clId="{D482683E-DF45-4BA1-B60E-919AB3CEA91E}" dt="2025-10-30T02:04:03.612" v="1215" actId="1036"/>
-          <ac:spMkLst>
-            <pc:docMk/>
-            <pc:sldMk cId="1503279884" sldId="302"/>
-            <ac:spMk id="29" creationId="{371F8149-79BD-D771-985A-1C532C8912FD}"/>
-          </ac:spMkLst>
-        </pc:spChg>
-        <pc:picChg chg="mod">
-          <ac:chgData name="Franco Andrés Chiappe Donoso" userId="952ef6fb-7da9-433b-9cb5-ab1c1c91cce3" providerId="ADAL" clId="{D482683E-DF45-4BA1-B60E-919AB3CEA91E}" dt="2025-10-30T02:04:03.612" v="1215" actId="1036"/>
-          <ac:picMkLst>
-            <pc:docMk/>
-            <pc:sldMk cId="1503279884" sldId="302"/>
-            <ac:picMk id="25" creationId="{1DDD4C1F-D94C-98C2-F569-3C7D58949398}"/>
-          </ac:picMkLst>
-        </pc:picChg>
-        <pc:picChg chg="mod">
-          <ac:chgData name="Franco Andrés Chiappe Donoso" userId="952ef6fb-7da9-433b-9cb5-ab1c1c91cce3" providerId="ADAL" clId="{D482683E-DF45-4BA1-B60E-919AB3CEA91E}" dt="2025-10-30T02:04:03.612" v="1215" actId="1036"/>
-          <ac:picMkLst>
-            <pc:docMk/>
-            <pc:sldMk cId="1503279884" sldId="302"/>
-            <ac:picMk id="1026" creationId="{0A825D96-E9C1-CEF6-FFDD-F0ACF50DEE83}"/>
-          </ac:picMkLst>
-        </pc:picChg>
-      </pc:sldChg>
-      <pc:sldChg chg="addSp delSp modSp mod modNotes">
-        <pc:chgData name="Franco Andrés Chiappe Donoso" userId="952ef6fb-7da9-433b-9cb5-ab1c1c91cce3" providerId="ADAL" clId="{D482683E-DF45-4BA1-B60E-919AB3CEA91E}" dt="2025-11-07T14:34:11.212" v="1235"/>
-        <pc:sldMkLst>
-          <pc:docMk/>
-          <pc:sldMk cId="817429082" sldId="305"/>
-        </pc:sldMkLst>
-        <pc:spChg chg="mod">
-          <ac:chgData name="Franco Andrés Chiappe Donoso" userId="952ef6fb-7da9-433b-9cb5-ab1c1c91cce3" providerId="ADAL" clId="{D482683E-DF45-4BA1-B60E-919AB3CEA91E}" dt="2025-10-29T23:32:04.692" v="632" actId="26606"/>
-          <ac:spMkLst>
-            <pc:docMk/>
-            <pc:sldMk cId="817429082" sldId="305"/>
-            <ac:spMk id="3" creationId="{117BF3F8-6A2D-6314-A70D-F0D60EAD9D21}"/>
-          </ac:spMkLst>
-        </pc:spChg>
-        <pc:spChg chg="mod">
-          <ac:chgData name="Franco Andrés Chiappe Donoso" userId="952ef6fb-7da9-433b-9cb5-ab1c1c91cce3" providerId="ADAL" clId="{D482683E-DF45-4BA1-B60E-919AB3CEA91E}" dt="2025-10-29T23:32:04.692" v="632" actId="26606"/>
-          <ac:spMkLst>
-            <pc:docMk/>
-            <pc:sldMk cId="817429082" sldId="305"/>
-            <ac:spMk id="6" creationId="{AF454EC2-1493-F15B-2A88-D5B0AA9844BC}"/>
-          </ac:spMkLst>
-        </pc:spChg>
-        <pc:spChg chg="add del">
-          <ac:chgData name="Franco Andrés Chiappe Donoso" userId="952ef6fb-7da9-433b-9cb5-ab1c1c91cce3" providerId="ADAL" clId="{D482683E-DF45-4BA1-B60E-919AB3CEA91E}" dt="2025-10-29T23:32:04.692" v="632" actId="26606"/>
-          <ac:spMkLst>
-            <pc:docMk/>
-            <pc:sldMk cId="817429082" sldId="305"/>
-            <ac:spMk id="11" creationId="{D0AE6E20-272B-4965-A636-4C47C90BBAD6}"/>
-          </ac:spMkLst>
-        </pc:spChg>
-        <pc:picChg chg="mod">
-          <ac:chgData name="Franco Andrés Chiappe Donoso" userId="952ef6fb-7da9-433b-9cb5-ab1c1c91cce3" providerId="ADAL" clId="{D482683E-DF45-4BA1-B60E-919AB3CEA91E}" dt="2025-10-29T23:32:04.692" v="632" actId="26606"/>
-          <ac:picMkLst>
-            <pc:docMk/>
-            <pc:sldMk cId="817429082" sldId="305"/>
-            <ac:picMk id="2" creationId="{52238C76-54F7-44F0-A407-24432A21F78B}"/>
-          </ac:picMkLst>
-        </pc:picChg>
-      </pc:sldChg>
-      <pc:sldChg chg="addSp delSp modSp mod modClrScheme chgLayout modNotes">
-        <pc:chgData name="Franco Andrés Chiappe Donoso" userId="952ef6fb-7da9-433b-9cb5-ab1c1c91cce3" providerId="ADAL" clId="{D482683E-DF45-4BA1-B60E-919AB3CEA91E}" dt="2025-11-07T14:34:11.212" v="1235"/>
-        <pc:sldMkLst>
-          <pc:docMk/>
-          <pc:sldMk cId="2664914889" sldId="306"/>
-        </pc:sldMkLst>
-        <pc:spChg chg="add">
-          <ac:chgData name="Franco Andrés Chiappe Donoso" userId="952ef6fb-7da9-433b-9cb5-ab1c1c91cce3" providerId="ADAL" clId="{D482683E-DF45-4BA1-B60E-919AB3CEA91E}" dt="2025-11-07T14:34:10.504" v="1234"/>
-          <ac:spMkLst>
-            <pc:docMk/>
-            <pc:sldMk cId="2664914889" sldId="306"/>
-            <ac:spMk id="2" creationId="{1EA2DED8-6C9F-61EF-7FE3-79071D8CC00B}"/>
-          </ac:spMkLst>
-        </pc:spChg>
-        <pc:spChg chg="add mod ord">
-          <ac:chgData name="Franco Andrés Chiappe Donoso" userId="952ef6fb-7da9-433b-9cb5-ab1c1c91cce3" providerId="ADAL" clId="{D482683E-DF45-4BA1-B60E-919AB3CEA91E}" dt="2025-10-30T14:20:18.082" v="1233" actId="20577"/>
-          <ac:spMkLst>
-            <pc:docMk/>
-            <pc:sldMk cId="2664914889" sldId="306"/>
-            <ac:spMk id="3" creationId="{9320A52B-4C9E-1F80-ACE4-6B5A3973A49B}"/>
-          </ac:spMkLst>
-        </pc:spChg>
-        <pc:spChg chg="add">
-          <ac:chgData name="Franco Andrés Chiappe Donoso" userId="952ef6fb-7da9-433b-9cb5-ab1c1c91cce3" providerId="ADAL" clId="{D482683E-DF45-4BA1-B60E-919AB3CEA91E}" dt="2025-11-07T14:34:10.504" v="1234"/>
-          <ac:spMkLst>
-            <pc:docMk/>
-            <pc:sldMk cId="2664914889" sldId="306"/>
-            <ac:spMk id="4" creationId="{2D266B75-34FF-7033-5598-7AD9240BF469}"/>
-          </ac:spMkLst>
-        </pc:spChg>
-        <pc:spChg chg="add mod">
-          <ac:chgData name="Franco Andrés Chiappe Donoso" userId="952ef6fb-7da9-433b-9cb5-ab1c1c91cce3" providerId="ADAL" clId="{D482683E-DF45-4BA1-B60E-919AB3CEA91E}" dt="2025-10-30T01:41:24.986" v="1080" actId="113"/>
-          <ac:spMkLst>
-            <pc:docMk/>
-            <pc:sldMk cId="2664914889" sldId="306"/>
-            <ac:spMk id="7" creationId="{355E47EC-035E-602C-ED23-380C5F23D695}"/>
-          </ac:spMkLst>
-        </pc:spChg>
-        <pc:spChg chg="add mod">
-          <ac:chgData name="Franco Andrés Chiappe Donoso" userId="952ef6fb-7da9-433b-9cb5-ab1c1c91cce3" providerId="ADAL" clId="{D482683E-DF45-4BA1-B60E-919AB3CEA91E}" dt="2025-10-30T01:51:30.214" v="1169" actId="1076"/>
-          <ac:spMkLst>
-            <pc:docMk/>
-            <pc:sldMk cId="2664914889" sldId="306"/>
-            <ac:spMk id="16" creationId="{AD66B3D9-ACC0-0682-B784-D7CB03A4EB9C}"/>
-          </ac:spMkLst>
-        </pc:spChg>
-        <pc:spChg chg="add mod">
-          <ac:chgData name="Franco Andrés Chiappe Donoso" userId="952ef6fb-7da9-433b-9cb5-ab1c1c91cce3" providerId="ADAL" clId="{D482683E-DF45-4BA1-B60E-919AB3CEA91E}" dt="2025-10-30T01:38:39.177" v="1076" actId="1036"/>
-          <ac:spMkLst>
-            <pc:docMk/>
-            <pc:sldMk cId="2664914889" sldId="306"/>
-            <ac:spMk id="18" creationId="{00FB9C70-B76A-2AEB-D4EB-1E08F19031FF}"/>
-          </ac:spMkLst>
-        </pc:spChg>
-        <pc:spChg chg="add mod">
-          <ac:chgData name="Franco Andrés Chiappe Donoso" userId="952ef6fb-7da9-433b-9cb5-ab1c1c91cce3" providerId="ADAL" clId="{D482683E-DF45-4BA1-B60E-919AB3CEA91E}" dt="2025-10-30T01:38:39.177" v="1076" actId="1036"/>
-          <ac:spMkLst>
-            <pc:docMk/>
-            <pc:sldMk cId="2664914889" sldId="306"/>
-            <ac:spMk id="21" creationId="{C805813E-229E-F11F-018B-4351E707E52B}"/>
-          </ac:spMkLst>
-        </pc:spChg>
-        <pc:spChg chg="add mod">
-          <ac:chgData name="Franco Andrés Chiappe Donoso" userId="952ef6fb-7da9-433b-9cb5-ab1c1c91cce3" providerId="ADAL" clId="{D482683E-DF45-4BA1-B60E-919AB3CEA91E}" dt="2025-10-30T01:38:39.177" v="1076" actId="1036"/>
-          <ac:spMkLst>
-            <pc:docMk/>
-            <pc:sldMk cId="2664914889" sldId="306"/>
-            <ac:spMk id="24" creationId="{8AC46688-9849-2CB4-E478-9ED45FE71ABD}"/>
-          </ac:spMkLst>
-        </pc:spChg>
-        <pc:spChg chg="add mod">
-          <ac:chgData name="Franco Andrés Chiappe Donoso" userId="952ef6fb-7da9-433b-9cb5-ab1c1c91cce3" providerId="ADAL" clId="{D482683E-DF45-4BA1-B60E-919AB3CEA91E}" dt="2025-10-30T01:38:39.177" v="1076" actId="1036"/>
-          <ac:spMkLst>
-            <pc:docMk/>
-            <pc:sldMk cId="2664914889" sldId="306"/>
-            <ac:spMk id="25" creationId="{1B744BCD-3D24-A961-1743-4FFA3B80A454}"/>
-          </ac:spMkLst>
-        </pc:spChg>
-        <pc:spChg chg="add mod">
-          <ac:chgData name="Franco Andrés Chiappe Donoso" userId="952ef6fb-7da9-433b-9cb5-ab1c1c91cce3" providerId="ADAL" clId="{D482683E-DF45-4BA1-B60E-919AB3CEA91E}" dt="2025-10-30T01:38:39.177" v="1076" actId="1036"/>
-          <ac:spMkLst>
-            <pc:docMk/>
-            <pc:sldMk cId="2664914889" sldId="306"/>
-            <ac:spMk id="26" creationId="{48F6CDF0-18D1-8509-0D8B-4B594B367BC0}"/>
-          </ac:spMkLst>
-        </pc:spChg>
-        <pc:spChg chg="add mod">
-          <ac:chgData name="Franco Andrés Chiappe Donoso" userId="952ef6fb-7da9-433b-9cb5-ab1c1c91cce3" providerId="ADAL" clId="{D482683E-DF45-4BA1-B60E-919AB3CEA91E}" dt="2025-10-30T01:38:39.177" v="1076" actId="1036"/>
-          <ac:spMkLst>
-            <pc:docMk/>
-            <pc:sldMk cId="2664914889" sldId="306"/>
-            <ac:spMk id="27" creationId="{82DAD043-D34B-69E4-5949-A23377ABFADA}"/>
-          </ac:spMkLst>
-        </pc:spChg>
-      </pc:sldChg>
-      <pc:sldChg chg="addSp delSp modSp mod modNotes">
-        <pc:chgData name="Franco Andrés Chiappe Donoso" userId="952ef6fb-7da9-433b-9cb5-ab1c1c91cce3" providerId="ADAL" clId="{D482683E-DF45-4BA1-B60E-919AB3CEA91E}" dt="2025-11-07T14:34:11.212" v="1235"/>
-        <pc:sldMkLst>
-          <pc:docMk/>
-          <pc:sldMk cId="1742696663" sldId="308"/>
-        </pc:sldMkLst>
-        <pc:spChg chg="add">
-          <ac:chgData name="Franco Andrés Chiappe Donoso" userId="952ef6fb-7da9-433b-9cb5-ab1c1c91cce3" providerId="ADAL" clId="{D482683E-DF45-4BA1-B60E-919AB3CEA91E}" dt="2025-11-07T14:34:10.504" v="1234"/>
-          <ac:spMkLst>
-            <pc:docMk/>
-            <pc:sldMk cId="1742696663" sldId="308"/>
-            <ac:spMk id="3" creationId="{EA8B5033-1745-2A24-AFAB-D9A4863CF367}"/>
-          </ac:spMkLst>
-        </pc:spChg>
-        <pc:spChg chg="add del mod">
-          <ac:chgData name="Franco Andrés Chiappe Donoso" userId="952ef6fb-7da9-433b-9cb5-ab1c1c91cce3" providerId="ADAL" clId="{D482683E-DF45-4BA1-B60E-919AB3CEA91E}" dt="2025-10-30T01:47:46.782" v="1132" actId="1076"/>
-          <ac:spMkLst>
-            <pc:docMk/>
-            <pc:sldMk cId="1742696663" sldId="308"/>
-            <ac:spMk id="4" creationId="{16CDA68E-5988-A924-A172-CC11EA30E6A3}"/>
-          </ac:spMkLst>
-        </pc:spChg>
-        <pc:spChg chg="mod">
-          <ac:chgData name="Franco Andrés Chiappe Donoso" userId="952ef6fb-7da9-433b-9cb5-ab1c1c91cce3" providerId="ADAL" clId="{D482683E-DF45-4BA1-B60E-919AB3CEA91E}" dt="2025-10-30T02:01:52.416" v="1208" actId="14100"/>
-          <ac:spMkLst>
-            <pc:docMk/>
-            <pc:sldMk cId="1742696663" sldId="308"/>
-            <ac:spMk id="5" creationId="{157650D1-C1D1-B421-5DD9-6E0C401C990C}"/>
-          </ac:spMkLst>
-        </pc:spChg>
-        <pc:spChg chg="add">
-          <ac:chgData name="Franco Andrés Chiappe Donoso" userId="952ef6fb-7da9-433b-9cb5-ab1c1c91cce3" providerId="ADAL" clId="{D482683E-DF45-4BA1-B60E-919AB3CEA91E}" dt="2025-11-07T14:34:10.504" v="1234"/>
-          <ac:spMkLst>
-            <pc:docMk/>
-            <pc:sldMk cId="1742696663" sldId="308"/>
-            <ac:spMk id="13" creationId="{B920645B-D631-8A41-4CF1-2792BA9075B7}"/>
-          </ac:spMkLst>
-        </pc:spChg>
-      </pc:sldChg>
-      <pc:sldChg chg="addSp delSp modSp new mod setBg delAnim modAnim">
-        <pc:chgData name="Franco Andrés Chiappe Donoso" userId="952ef6fb-7da9-433b-9cb5-ab1c1c91cce3" providerId="ADAL" clId="{D482683E-DF45-4BA1-B60E-919AB3CEA91E}" dt="2025-11-07T14:34:10.504" v="1234"/>
-        <pc:sldMkLst>
-          <pc:docMk/>
-          <pc:sldMk cId="2203496934" sldId="309"/>
-        </pc:sldMkLst>
-        <pc:spChg chg="add">
-          <ac:chgData name="Franco Andrés Chiappe Donoso" userId="952ef6fb-7da9-433b-9cb5-ab1c1c91cce3" providerId="ADAL" clId="{D482683E-DF45-4BA1-B60E-919AB3CEA91E}" dt="2025-11-07T14:34:10.504" v="1234"/>
-          <ac:spMkLst>
-            <pc:docMk/>
-            <pc:sldMk cId="2203496934" sldId="309"/>
-            <ac:spMk id="2" creationId="{C05A3EC5-78A9-9984-7B2B-F33933C3EEAA}"/>
-          </ac:spMkLst>
-        </pc:spChg>
-        <pc:spChg chg="add">
-          <ac:chgData name="Franco Andrés Chiappe Donoso" userId="952ef6fb-7da9-433b-9cb5-ab1c1c91cce3" providerId="ADAL" clId="{D482683E-DF45-4BA1-B60E-919AB3CEA91E}" dt="2025-11-07T14:34:10.504" v="1234"/>
-          <ac:spMkLst>
-            <pc:docMk/>
-            <pc:sldMk cId="2203496934" sldId="309"/>
-            <ac:spMk id="3" creationId="{059B7A5B-4E1F-C4C8-D1C4-54428F603FA5}"/>
-          </ac:spMkLst>
-        </pc:spChg>
-        <pc:spChg chg="add mod">
-          <ac:chgData name="Franco Andrés Chiappe Donoso" userId="952ef6fb-7da9-433b-9cb5-ab1c1c91cce3" providerId="ADAL" clId="{D482683E-DF45-4BA1-B60E-919AB3CEA91E}" dt="2025-10-30T00:46:05.265" v="657"/>
-          <ac:spMkLst>
-            <pc:docMk/>
-            <pc:sldMk cId="2203496934" sldId="309"/>
-            <ac:spMk id="40" creationId="{5D9921EE-2028-0F34-2466-DE95E8B574D8}"/>
-          </ac:spMkLst>
-        </pc:spChg>
-        <pc:spChg chg="add mod">
-          <ac:chgData name="Franco Andrés Chiappe Donoso" userId="952ef6fb-7da9-433b-9cb5-ab1c1c91cce3" providerId="ADAL" clId="{D482683E-DF45-4BA1-B60E-919AB3CEA91E}" dt="2025-10-30T01:44:32.876" v="1113" actId="14100"/>
-          <ac:spMkLst>
-            <pc:docMk/>
-            <pc:sldMk cId="2203496934" sldId="309"/>
-            <ac:spMk id="45" creationId="{37BA99A1-0FDF-2266-A615-5B5470418243}"/>
-          </ac:spMkLst>
-        </pc:spChg>
-        <pc:picChg chg="add mod">
-          <ac:chgData name="Franco Andrés Chiappe Donoso" userId="952ef6fb-7da9-433b-9cb5-ab1c1c91cce3" providerId="ADAL" clId="{D482683E-DF45-4BA1-B60E-919AB3CEA91E}" dt="2025-10-30T00:44:43.903" v="640" actId="1076"/>
-          <ac:picMkLst>
-            <pc:docMk/>
-            <pc:sldMk cId="2203496934" sldId="309"/>
-            <ac:picMk id="17" creationId="{BB27272B-A930-9C96-EE47-593FC3CA9C5D}"/>
-          </ac:picMkLst>
-        </pc:picChg>
-      </pc:sldChg>
-      <pc:sldChg chg="addSp delSp modSp add mod delAnim modNotes">
-        <pc:chgData name="Franco Andrés Chiappe Donoso" userId="952ef6fb-7da9-433b-9cb5-ab1c1c91cce3" providerId="ADAL" clId="{D482683E-DF45-4BA1-B60E-919AB3CEA91E}" dt="2025-11-07T14:34:11.212" v="1235"/>
-        <pc:sldMkLst>
-          <pc:docMk/>
-          <pc:sldMk cId="1922780917" sldId="314"/>
-        </pc:sldMkLst>
-        <pc:spChg chg="add">
-          <ac:chgData name="Franco Andrés Chiappe Donoso" userId="952ef6fb-7da9-433b-9cb5-ab1c1c91cce3" providerId="ADAL" clId="{D482683E-DF45-4BA1-B60E-919AB3CEA91E}" dt="2025-11-07T14:34:10.504" v="1234"/>
-          <ac:spMkLst>
-            <pc:docMk/>
-            <pc:sldMk cId="1922780917" sldId="314"/>
-            <ac:spMk id="2" creationId="{078952F3-33CB-7F02-0737-92ED56BD7680}"/>
-          </ac:spMkLst>
-        </pc:spChg>
-        <pc:spChg chg="mod">
-          <ac:chgData name="Franco Andrés Chiappe Donoso" userId="952ef6fb-7da9-433b-9cb5-ab1c1c91cce3" providerId="ADAL" clId="{D482683E-DF45-4BA1-B60E-919AB3CEA91E}" dt="2025-10-30T01:56:15.329" v="1199" actId="14100"/>
-          <ac:spMkLst>
-            <pc:docMk/>
-            <pc:sldMk cId="1922780917" sldId="314"/>
-            <ac:spMk id="3" creationId="{90C2D83A-1601-6264-CA1F-14B7FE9BC973}"/>
-          </ac:spMkLst>
-        </pc:spChg>
-        <pc:spChg chg="mod">
-          <ac:chgData name="Franco Andrés Chiappe Donoso" userId="952ef6fb-7da9-433b-9cb5-ab1c1c91cce3" providerId="ADAL" clId="{D482683E-DF45-4BA1-B60E-919AB3CEA91E}" dt="2025-10-30T02:00:47.854" v="1206" actId="14100"/>
-          <ac:spMkLst>
-            <pc:docMk/>
-            <pc:sldMk cId="1922780917" sldId="314"/>
-            <ac:spMk id="4" creationId="{EE133477-90DB-5612-AC2C-91D199652957}"/>
-          </ac:spMkLst>
-        </pc:spChg>
-        <pc:spChg chg="add">
-          <ac:chgData name="Franco Andrés Chiappe Donoso" userId="952ef6fb-7da9-433b-9cb5-ab1c1c91cce3" providerId="ADAL" clId="{D482683E-DF45-4BA1-B60E-919AB3CEA91E}" dt="2025-11-07T14:34:10.504" v="1234"/>
-          <ac:spMkLst>
-            <pc:docMk/>
-            <pc:sldMk cId="1922780917" sldId="314"/>
-            <ac:spMk id="5" creationId="{ADAF3FDC-4020-73F1-A020-50EE5996D9DF}"/>
-          </ac:spMkLst>
-        </pc:spChg>
-        <pc:spChg chg="add mod">
-          <ac:chgData name="Franco Andrés Chiappe Donoso" userId="952ef6fb-7da9-433b-9cb5-ab1c1c91cce3" providerId="ADAL" clId="{D482683E-DF45-4BA1-B60E-919AB3CEA91E}" dt="2025-10-30T01:26:13.528" v="923"/>
-          <ac:spMkLst>
-            <pc:docMk/>
-            <pc:sldMk cId="1922780917" sldId="314"/>
-            <ac:spMk id="15" creationId="{6E0E44F1-F51D-E652-EAF0-B503555107B7}"/>
-          </ac:spMkLst>
-        </pc:spChg>
-        <pc:graphicFrameChg chg="add mod modGraphic">
-          <ac:chgData name="Franco Andrés Chiappe Donoso" userId="952ef6fb-7da9-433b-9cb5-ab1c1c91cce3" providerId="ADAL" clId="{D482683E-DF45-4BA1-B60E-919AB3CEA91E}" dt="2025-10-30T01:05:54.856" v="787" actId="12385"/>
-          <ac:graphicFrameMkLst>
-            <pc:docMk/>
-            <pc:sldMk cId="1922780917" sldId="314"/>
-            <ac:graphicFrameMk id="6" creationId="{D366FF07-7F5A-95AD-24B6-8F430928C324}"/>
-          </ac:graphicFrameMkLst>
-        </pc:graphicFrameChg>
-        <pc:graphicFrameChg chg="add del mod modGraphic">
-          <ac:chgData name="Franco Andrés Chiappe Donoso" userId="952ef6fb-7da9-433b-9cb5-ab1c1c91cce3" providerId="ADAL" clId="{D482683E-DF45-4BA1-B60E-919AB3CEA91E}" dt="2025-10-30T01:05:38.403" v="786" actId="1076"/>
-          <ac:graphicFrameMkLst>
-            <pc:docMk/>
-            <pc:sldMk cId="1922780917" sldId="314"/>
-            <ac:graphicFrameMk id="9" creationId="{69F54078-C3D6-5111-0821-1336F9FEC1A5}"/>
-          </ac:graphicFrameMkLst>
-        </pc:graphicFrameChg>
-      </pc:sldChg>
-      <pc:sldChg chg="addSp delSp modSp add mod ord modNotes">
-        <pc:chgData name="Franco Andrés Chiappe Donoso" userId="952ef6fb-7da9-433b-9cb5-ab1c1c91cce3" providerId="ADAL" clId="{D482683E-DF45-4BA1-B60E-919AB3CEA91E}" dt="2025-11-07T14:34:11.212" v="1235"/>
-        <pc:sldMkLst>
-          <pc:docMk/>
-          <pc:sldMk cId="2528429738" sldId="315"/>
-        </pc:sldMkLst>
-        <pc:spChg chg="add">
-          <ac:chgData name="Franco Andrés Chiappe Donoso" userId="952ef6fb-7da9-433b-9cb5-ab1c1c91cce3" providerId="ADAL" clId="{D482683E-DF45-4BA1-B60E-919AB3CEA91E}" dt="2025-11-07T14:34:10.504" v="1234"/>
-          <ac:spMkLst>
-            <pc:docMk/>
-            <pc:sldMk cId="2528429738" sldId="315"/>
-            <ac:spMk id="3" creationId="{F473BA43-19E8-89F5-7D66-AA089E25F0D0}"/>
-          </ac:spMkLst>
-        </pc:spChg>
-        <pc:spChg chg="add">
-          <ac:chgData name="Franco Andrés Chiappe Donoso" userId="952ef6fb-7da9-433b-9cb5-ab1c1c91cce3" providerId="ADAL" clId="{D482683E-DF45-4BA1-B60E-919AB3CEA91E}" dt="2025-11-07T14:34:10.504" v="1234"/>
-          <ac:spMkLst>
-            <pc:docMk/>
-            <pc:sldMk cId="2528429738" sldId="315"/>
-            <ac:spMk id="4" creationId="{CB39DE7A-ED58-CF60-7094-75578E6716DA}"/>
-          </ac:spMkLst>
-        </pc:spChg>
-        <pc:spChg chg="mod">
-          <ac:chgData name="Franco Andrés Chiappe Donoso" userId="952ef6fb-7da9-433b-9cb5-ab1c1c91cce3" providerId="ADAL" clId="{D482683E-DF45-4BA1-B60E-919AB3CEA91E}" dt="2025-10-30T01:16:00.452" v="804" actId="6549"/>
-          <ac:spMkLst>
-            <pc:docMk/>
-            <pc:sldMk cId="2528429738" sldId="315"/>
-            <ac:spMk id="5" creationId="{5C3515ED-CEAD-55F9-1477-039DF9CCEDF8}"/>
-          </ac:spMkLst>
-        </pc:spChg>
-        <pc:spChg chg="add del">
-          <ac:chgData name="Franco Andrés Chiappe Donoso" userId="952ef6fb-7da9-433b-9cb5-ab1c1c91cce3" providerId="ADAL" clId="{D482683E-DF45-4BA1-B60E-919AB3CEA91E}" dt="2025-10-30T01:15:59.811" v="802" actId="478"/>
-          <ac:spMkLst>
-            <pc:docMk/>
-            <pc:sldMk cId="2528429738" sldId="315"/>
-            <ac:spMk id="10" creationId="{C92EBDED-C8B7-D345-2246-EE7A17F4EE4B}"/>
-          </ac:spMkLst>
-        </pc:spChg>
-        <pc:spChg chg="add del mod">
-          <ac:chgData name="Franco Andrés Chiappe Donoso" userId="952ef6fb-7da9-433b-9cb5-ab1c1c91cce3" providerId="ADAL" clId="{D482683E-DF45-4BA1-B60E-919AB3CEA91E}" dt="2025-10-30T01:15:58.182" v="800" actId="6549"/>
-          <ac:spMkLst>
-            <pc:docMk/>
-            <pc:sldMk cId="2528429738" sldId="315"/>
-            <ac:spMk id="12" creationId="{F40AB9A3-6914-B76C-9E39-F1D8830C96E8}"/>
-          </ac:spMkLst>
-        </pc:spChg>
-        <pc:picChg chg="add del">
-          <ac:chgData name="Franco Andrés Chiappe Donoso" userId="952ef6fb-7da9-433b-9cb5-ab1c1c91cce3" providerId="ADAL" clId="{D482683E-DF45-4BA1-B60E-919AB3CEA91E}" dt="2025-10-30T01:15:59.328" v="801" actId="478"/>
-          <ac:picMkLst>
-            <pc:docMk/>
-            <pc:sldMk cId="2528429738" sldId="315"/>
-            <ac:picMk id="11" creationId="{D803F78D-32DF-429B-5CAB-91E79C632C0C}"/>
-          </ac:picMkLst>
-        </pc:picChg>
-        <pc:picChg chg="add del">
-          <ac:chgData name="Franco Andrés Chiappe Donoso" userId="952ef6fb-7da9-433b-9cb5-ab1c1c91cce3" providerId="ADAL" clId="{D482683E-DF45-4BA1-B60E-919AB3CEA91E}" dt="2025-10-30T01:16:00.159" v="803" actId="478"/>
-          <ac:picMkLst>
-            <pc:docMk/>
-            <pc:sldMk cId="2528429738" sldId="315"/>
-            <ac:picMk id="13" creationId="{27B75554-818F-80A1-0BD7-6562DC609A7D}"/>
-          </ac:picMkLst>
-        </pc:picChg>
-      </pc:sldChg>
-      <pc:sldChg chg="addSp delSp modSp new mod">
-        <pc:chgData name="Franco Andrés Chiappe Donoso" userId="952ef6fb-7da9-433b-9cb5-ab1c1c91cce3" providerId="ADAL" clId="{D482683E-DF45-4BA1-B60E-919AB3CEA91E}" dt="2025-11-07T14:34:10.504" v="1234"/>
-        <pc:sldMkLst>
-          <pc:docMk/>
-          <pc:sldMk cId="1828876654" sldId="318"/>
-        </pc:sldMkLst>
-        <pc:spChg chg="mod">
-          <ac:chgData name="Franco Andrés Chiappe Donoso" userId="952ef6fb-7da9-433b-9cb5-ab1c1c91cce3" providerId="ADAL" clId="{D482683E-DF45-4BA1-B60E-919AB3CEA91E}" dt="2025-10-30T01:54:46.796" v="1196" actId="27636"/>
-          <ac:spMkLst>
-            <pc:docMk/>
-            <pc:sldMk cId="1828876654" sldId="318"/>
-            <ac:spMk id="2" creationId="{250C6120-8003-E039-A070-A76FAFEF2461}"/>
-          </ac:spMkLst>
-        </pc:spChg>
-        <pc:spChg chg="add">
-          <ac:chgData name="Franco Andrés Chiappe Donoso" userId="952ef6fb-7da9-433b-9cb5-ab1c1c91cce3" providerId="ADAL" clId="{D482683E-DF45-4BA1-B60E-919AB3CEA91E}" dt="2025-11-07T14:34:10.504" v="1234"/>
-          <ac:spMkLst>
-            <pc:docMk/>
-            <pc:sldMk cId="1828876654" sldId="318"/>
-            <ac:spMk id="3" creationId="{4E222EF5-71FE-0795-3A7D-E62EFFE41834}"/>
-          </ac:spMkLst>
-        </pc:spChg>
-        <pc:spChg chg="add mod">
-          <ac:chgData name="Franco Andrés Chiappe Donoso" userId="952ef6fb-7da9-433b-9cb5-ab1c1c91cce3" providerId="ADAL" clId="{D482683E-DF45-4BA1-B60E-919AB3CEA91E}" dt="2025-10-30T01:52:28.527" v="1184" actId="113"/>
-          <ac:spMkLst>
-            <pc:docMk/>
-            <pc:sldMk cId="1828876654" sldId="318"/>
-            <ac:spMk id="4" creationId="{1847E77A-BFE3-D4DC-8CFA-E122294A5BBD}"/>
-          </ac:spMkLst>
-        </pc:spChg>
-        <pc:spChg chg="add mod">
-          <ac:chgData name="Franco Andrés Chiappe Donoso" userId="952ef6fb-7da9-433b-9cb5-ab1c1c91cce3" providerId="ADAL" clId="{D482683E-DF45-4BA1-B60E-919AB3CEA91E}" dt="2025-10-30T14:19:35.752" v="1223" actId="20577"/>
-          <ac:spMkLst>
-            <pc:docMk/>
-            <pc:sldMk cId="1828876654" sldId="318"/>
-            <ac:spMk id="5" creationId="{EB9DFE3C-F19F-C211-5F58-75FA530E6F26}"/>
-          </ac:spMkLst>
-        </pc:spChg>
-        <pc:spChg chg="add mod">
-          <ac:chgData name="Franco Andrés Chiappe Donoso" userId="952ef6fb-7da9-433b-9cb5-ab1c1c91cce3" providerId="ADAL" clId="{D482683E-DF45-4BA1-B60E-919AB3CEA91E}" dt="2025-10-30T01:54:59.551" v="1198" actId="1076"/>
-          <ac:spMkLst>
-            <pc:docMk/>
-            <pc:sldMk cId="1828876654" sldId="318"/>
-            <ac:spMk id="6" creationId="{8AFADFC0-16B5-586A-9A3A-F32743A8CA4D}"/>
-          </ac:spMkLst>
-        </pc:spChg>
-        <pc:spChg chg="add mod">
-          <ac:chgData name="Franco Andrés Chiappe Donoso" userId="952ef6fb-7da9-433b-9cb5-ab1c1c91cce3" providerId="ADAL" clId="{D482683E-DF45-4BA1-B60E-919AB3CEA91E}" dt="2025-10-30T14:19:45.896" v="1227" actId="20577"/>
-          <ac:spMkLst>
-            <pc:docMk/>
-            <pc:sldMk cId="1828876654" sldId="318"/>
-            <ac:spMk id="7" creationId="{2B49864A-0AEC-892B-6D24-818EED0A04B3}"/>
-          </ac:spMkLst>
-        </pc:spChg>
-        <pc:spChg chg="add">
-          <ac:chgData name="Franco Andrés Chiappe Donoso" userId="952ef6fb-7da9-433b-9cb5-ab1c1c91cce3" providerId="ADAL" clId="{D482683E-DF45-4BA1-B60E-919AB3CEA91E}" dt="2025-11-07T14:34:10.504" v="1234"/>
-          <ac:spMkLst>
-            <pc:docMk/>
-            <pc:sldMk cId="1828876654" sldId="318"/>
-            <ac:spMk id="8" creationId="{E4BBF5AE-62B0-81FC-EF6E-1287BC5C27A7}"/>
-          </ac:spMkLst>
-        </pc:spChg>
-      </pc:sldChg>
-      <pc:sldChg chg="delSp add setBg delDesignElem modNotes">
-        <pc:chgData name="Franco Andrés Chiappe Donoso" userId="952ef6fb-7da9-433b-9cb5-ab1c1c91cce3" providerId="ADAL" clId="{D482683E-DF45-4BA1-B60E-919AB3CEA91E}" dt="2025-11-07T14:34:11.212" v="1235"/>
-        <pc:sldMkLst>
-          <pc:docMk/>
-          <pc:sldMk cId="3059818524" sldId="319"/>
-        </pc:sldMkLst>
-      </pc:sldChg>
-    </pc:docChg>
-  </pc:docChgLst>
-  <pc:docChgLst>
-    <pc:chgData name="Ziyu Guo ." userId="S::ziyuguo@uc.cl::5d0ee9bc-099e-4375-8de4-b9df224602ff" providerId="AD" clId="Web-{B7994127-FF6C-1E05-3AF2-35DA531A4773}"/>
-    <pc:docChg chg="addSld modSld sldOrd addSection modSection">
-      <pc:chgData name="Ziyu Guo ." userId="S::ziyuguo@uc.cl::5d0ee9bc-099e-4375-8de4-b9df224602ff" providerId="AD" clId="Web-{B7994127-FF6C-1E05-3AF2-35DA531A4773}" dt="2025-10-30T00:20:22.956" v="20" actId="20577"/>
-      <pc:docMkLst>
-        <pc:docMk/>
-      </pc:docMkLst>
-      <pc:sldChg chg="ord">
-        <pc:chgData name="Ziyu Guo ." userId="S::ziyuguo@uc.cl::5d0ee9bc-099e-4375-8de4-b9df224602ff" providerId="AD" clId="Web-{B7994127-FF6C-1E05-3AF2-35DA531A4773}" dt="2025-10-30T00:20:05.985" v="9"/>
-        <pc:sldMkLst>
-          <pc:docMk/>
-          <pc:sldMk cId="2664914889" sldId="306"/>
-        </pc:sldMkLst>
       </pc:sldChg>
     </pc:docChg>
   </pc:docChgLst>
@@ -1103,7 +444,7 @@
           <a:p>
             <a:fld id="{29AFF5F3-38AF-4FFD-8332-920448D4C08C}" type="datetimeFigureOut">
               <a:rPr lang="es-CL" smtClean="0"/>
-              <a:t>07-11-2025</a:t>
+              <a:t>08-12-2025</a:t>
             </a:fld>
             <a:endParaRPr lang="es-CL"/>
           </a:p>
@@ -1280,7 +621,7 @@
           <a:p>
             <a:fld id="{58E0C773-1EBF-4445-96D5-9CDB7DE9012C}" type="datetimeFigureOut">
               <a:rPr lang="es-CL" smtClean="0"/>
-              <a:t>07-11-2025</a:t>
+              <a:t>07-12-2025</a:t>
             </a:fld>
             <a:endParaRPr lang="es-CL"/>
           </a:p>
@@ -2006,7 +1347,7 @@
           <a:bodyPr/>
           <a:lstStyle/>
           <a:p>
-            <a:endParaRPr lang="es-CL"/>
+            <a:endParaRPr lang="es-CL" dirty="0"/>
           </a:p>
         </p:txBody>
       </p:sp>
@@ -3140,7 +2481,7 @@
           <a:p>
             <a:fld id="{85C868CF-7313-433E-B140-7E0A6D05BA41}" type="datetimeFigureOut">
               <a:rPr lang="es-CL" smtClean="0"/>
-              <a:t>07-11-2025</a:t>
+              <a:t>07-12-2025</a:t>
             </a:fld>
             <a:endParaRPr lang="es-CL"/>
           </a:p>
@@ -3368,7 +2709,7 @@
           <a:p>
             <a:fld id="{85C868CF-7313-433E-B140-7E0A6D05BA41}" type="datetimeFigureOut">
               <a:rPr lang="es-CL" smtClean="0"/>
-              <a:t>07-11-2025</a:t>
+              <a:t>07-12-2025</a:t>
             </a:fld>
             <a:endParaRPr lang="es-CL"/>
           </a:p>
@@ -3601,7 +2942,7 @@
           <a:p>
             <a:fld id="{85C868CF-7313-433E-B140-7E0A6D05BA41}" type="datetimeFigureOut">
               <a:rPr lang="es-CL" smtClean="0"/>
-              <a:t>07-11-2025</a:t>
+              <a:t>07-12-2025</a:t>
             </a:fld>
             <a:endParaRPr lang="es-CL"/>
           </a:p>
@@ -3891,7 +3232,7 @@
           <a:p>
             <a:fld id="{85C868CF-7313-433E-B140-7E0A6D05BA41}" type="datetimeFigureOut">
               <a:rPr lang="es-CL" smtClean="0"/>
-              <a:t>07-11-2025</a:t>
+              <a:t>07-12-2025</a:t>
             </a:fld>
             <a:endParaRPr lang="es-CL"/>
           </a:p>
@@ -4031,7 +3372,7 @@
           <a:p>
             <a:fld id="{85C868CF-7313-433E-B140-7E0A6D05BA41}" type="datetimeFigureOut">
               <a:rPr lang="es-CL" smtClean="0"/>
-              <a:t>07-11-2025</a:t>
+              <a:t>07-12-2025</a:t>
             </a:fld>
             <a:endParaRPr lang="es-CL"/>
           </a:p>
@@ -4344,7 +3685,7 @@
           <a:p>
             <a:fld id="{85C868CF-7313-433E-B140-7E0A6D05BA41}" type="datetimeFigureOut">
               <a:rPr lang="es-CL" smtClean="0"/>
-              <a:t>07-11-2025</a:t>
+              <a:t>07-12-2025</a:t>
             </a:fld>
             <a:endParaRPr lang="es-CL"/>
           </a:p>
@@ -4604,7 +3945,7 @@
           <a:p>
             <a:fld id="{85C868CF-7313-433E-B140-7E0A6D05BA41}" type="datetimeFigureOut">
               <a:rPr lang="es-CL" smtClean="0"/>
-              <a:t>07-11-2025</a:t>
+              <a:t>07-12-2025</a:t>
             </a:fld>
             <a:endParaRPr lang="es-CL"/>
           </a:p>
@@ -5075,7 +4416,7 @@
           <a:p>
             <a:fld id="{85C868CF-7313-433E-B140-7E0A6D05BA41}" type="datetimeFigureOut">
               <a:rPr lang="es-CL" smtClean="0"/>
-              <a:t>07-11-2025</a:t>
+              <a:t>07-12-2025</a:t>
             </a:fld>
             <a:endParaRPr lang="es-CL"/>
           </a:p>
@@ -5236,7 +4577,7 @@
           <a:p>
             <a:fld id="{85C868CF-7313-433E-B140-7E0A6D05BA41}" type="datetimeFigureOut">
               <a:rPr lang="es-CL" smtClean="0"/>
-              <a:t>07-11-2025</a:t>
+              <a:t>07-12-2025</a:t>
             </a:fld>
             <a:endParaRPr lang="es-CL"/>
           </a:p>
@@ -5331,7 +4672,7 @@
           <a:p>
             <a:fld id="{85C868CF-7313-433E-B140-7E0A6D05BA41}" type="datetimeFigureOut">
               <a:rPr lang="es-CL" smtClean="0"/>
-              <a:t>07-11-2025</a:t>
+              <a:t>07-12-2025</a:t>
             </a:fld>
             <a:endParaRPr lang="es-CL"/>
           </a:p>
@@ -5707,7 +5048,7 @@
           <a:p>
             <a:fld id="{85C868CF-7313-433E-B140-7E0A6D05BA41}" type="datetimeFigureOut">
               <a:rPr lang="es-CL" smtClean="0"/>
-              <a:t>07-11-2025</a:t>
+              <a:t>07-12-2025</a:t>
             </a:fld>
             <a:endParaRPr lang="es-CL"/>
           </a:p>
@@ -5941,7 +5282,7 @@
           <a:p>
             <a:fld id="{85C868CF-7313-433E-B140-7E0A6D05BA41}" type="datetimeFigureOut">
               <a:rPr lang="es-CL" smtClean="0"/>
-              <a:t>07-11-2025</a:t>
+              <a:t>07-12-2025</a:t>
             </a:fld>
             <a:endParaRPr lang="es-CL"/>
           </a:p>
@@ -11357,10 +10698,10 @@
           <a:lstStyle/>
           <a:p>
             <a:r>
-              <a:rPr lang="es-CL" sz="2800"/>
+              <a:rPr lang="es-CL" sz="2800" dirty="0"/>
               <a:t>DATOS: SERIES DE TIEMPO MULTIVARIABLES DE SENSORES EN PLANTAS DE TRATAMIENTO</a:t>
             </a:r>
-            <a:endParaRPr lang="es-CL" sz="2800" b="1" noProof="0"/>
+            <a:endParaRPr lang="es-CL" sz="2800" b="1" noProof="0" dirty="0"/>
           </a:p>
         </p:txBody>
       </p:sp>
@@ -11399,29 +10740,29 @@
           <a:p>
             <a:pPr marL="305435" indent="-305435"/>
             <a:r>
-              <a:rPr lang="es-CL" noProof="0"/>
+              <a:rPr lang="es-CL" noProof="0" dirty="0"/>
               <a:t>Los datos presentan variabilidad entre plantas y sensores, lo que exige ajustar los modelos por tipo de variable y contexto operativo</a:t>
             </a:r>
           </a:p>
           <a:p>
             <a:pPr marL="305435" indent="-305435"/>
             <a:r>
-              <a:rPr lang="es-CL" noProof="0"/>
+              <a:rPr lang="es-CL" noProof="0" dirty="0"/>
               <a:t>Se trabaja con series de tiempo minuto a minuto, lo que permite un monitoreo continuo y una respuesta temprana ante desviaciones.</a:t>
             </a:r>
           </a:p>
           <a:p>
             <a:pPr marL="305435" indent="-305435"/>
             <a:r>
-              <a:rPr lang="es-CL" noProof="0"/>
+              <a:rPr lang="es-CL" noProof="0" dirty="0"/>
               <a:t>Contamos con datos etiquetados manualmente por nosotros para entrenar y validar los modelos de detección de </a:t>
             </a:r>
             <a:r>
-              <a:rPr lang="es-CL" noProof="0" err="1"/>
+              <a:rPr lang="es-CL" noProof="0" dirty="0" err="1"/>
               <a:t>outliers</a:t>
             </a:r>
             <a:r>
-              <a:rPr lang="es-CL" noProof="0"/>
+              <a:rPr lang="es-CL" noProof="0" dirty="0"/>
               <a:t>.</a:t>
             </a:r>
           </a:p>
@@ -12636,8 +11977,9 @@
           <a:p>
             <a:r>
               <a:rPr lang="es-CL" b="1"/>
-              <a:t>IMPLEMENTACIÓN DE MÉTODOS AUTOMÁTICOS PARA DETECTAR ANOMALÍAS EN SERIES DE TIEMPO</a:t>
-            </a:r>
+              <a:t>c</a:t>
+            </a:r>
+            <a:endParaRPr lang="es-CL" b="1" dirty="0"/>
           </a:p>
         </p:txBody>
       </p:sp>
